--- a/Doc Slide/Slide Jeudi 11_09.pptx
+++ b/Doc Slide/Slide Jeudi 11_09.pptx
@@ -6,6 +6,8 @@
   </p:sldMasterIdLst>
   <p:sldIdLst>
     <p:sldId id="256" r:id="rId2"/>
+    <p:sldId id="259" r:id="rId3"/>
+    <p:sldId id="258" r:id="rId4"/>
   </p:sldIdLst>
   <p:sldSz cx="12192000" cy="6858000"/>
   <p:notesSz cx="6858000" cy="9144000"/>
@@ -104,6 +106,11 @@
       </a:defRPr>
     </a:lvl9pPr>
   </p:defaultTextStyle>
+  <p:extLst>
+    <p:ext uri="{EFAFB233-063F-42B5-8137-9DF3F51BA10A}">
+      <p15:sldGuideLst xmlns:p15="http://schemas.microsoft.com/office/powerpoint/2012/main"/>
+    </p:ext>
+  </p:extLst>
 </p:presentation>
 </file>
 
@@ -254,7 +261,7 @@
           <a:p>
             <a:fld id="{CD467743-7149-468D-8631-B8D9925B4116}" type="datetimeFigureOut">
               <a:rPr lang="fr-FR" smtClean="0"/>
-              <a:t>05/09/2025</a:t>
+              <a:t>16/09/2025</a:t>
             </a:fld>
             <a:endParaRPr lang="fr-FR"/>
           </a:p>
@@ -452,7 +459,7 @@
           <a:p>
             <a:fld id="{CD467743-7149-468D-8631-B8D9925B4116}" type="datetimeFigureOut">
               <a:rPr lang="fr-FR" smtClean="0"/>
-              <a:t>05/09/2025</a:t>
+              <a:t>16/09/2025</a:t>
             </a:fld>
             <a:endParaRPr lang="fr-FR"/>
           </a:p>
@@ -660,7 +667,7 @@
           <a:p>
             <a:fld id="{CD467743-7149-468D-8631-B8D9925B4116}" type="datetimeFigureOut">
               <a:rPr lang="fr-FR" smtClean="0"/>
-              <a:t>05/09/2025</a:t>
+              <a:t>16/09/2025</a:t>
             </a:fld>
             <a:endParaRPr lang="fr-FR"/>
           </a:p>
@@ -858,7 +865,7 @@
           <a:p>
             <a:fld id="{CD467743-7149-468D-8631-B8D9925B4116}" type="datetimeFigureOut">
               <a:rPr lang="fr-FR" smtClean="0"/>
-              <a:t>05/09/2025</a:t>
+              <a:t>16/09/2025</a:t>
             </a:fld>
             <a:endParaRPr lang="fr-FR"/>
           </a:p>
@@ -1133,7 +1140,7 @@
           <a:p>
             <a:fld id="{CD467743-7149-468D-8631-B8D9925B4116}" type="datetimeFigureOut">
               <a:rPr lang="fr-FR" smtClean="0"/>
-              <a:t>05/09/2025</a:t>
+              <a:t>16/09/2025</a:t>
             </a:fld>
             <a:endParaRPr lang="fr-FR"/>
           </a:p>
@@ -1398,7 +1405,7 @@
           <a:p>
             <a:fld id="{CD467743-7149-468D-8631-B8D9925B4116}" type="datetimeFigureOut">
               <a:rPr lang="fr-FR" smtClean="0"/>
-              <a:t>05/09/2025</a:t>
+              <a:t>16/09/2025</a:t>
             </a:fld>
             <a:endParaRPr lang="fr-FR"/>
           </a:p>
@@ -1810,7 +1817,7 @@
           <a:p>
             <a:fld id="{CD467743-7149-468D-8631-B8D9925B4116}" type="datetimeFigureOut">
               <a:rPr lang="fr-FR" smtClean="0"/>
-              <a:t>05/09/2025</a:t>
+              <a:t>16/09/2025</a:t>
             </a:fld>
             <a:endParaRPr lang="fr-FR"/>
           </a:p>
@@ -1951,7 +1958,7 @@
           <a:p>
             <a:fld id="{CD467743-7149-468D-8631-B8D9925B4116}" type="datetimeFigureOut">
               <a:rPr lang="fr-FR" smtClean="0"/>
-              <a:t>05/09/2025</a:t>
+              <a:t>16/09/2025</a:t>
             </a:fld>
             <a:endParaRPr lang="fr-FR"/>
           </a:p>
@@ -2064,7 +2071,7 @@
           <a:p>
             <a:fld id="{CD467743-7149-468D-8631-B8D9925B4116}" type="datetimeFigureOut">
               <a:rPr lang="fr-FR" smtClean="0"/>
-              <a:t>05/09/2025</a:t>
+              <a:t>16/09/2025</a:t>
             </a:fld>
             <a:endParaRPr lang="fr-FR"/>
           </a:p>
@@ -2375,7 +2382,7 @@
           <a:p>
             <a:fld id="{CD467743-7149-468D-8631-B8D9925B4116}" type="datetimeFigureOut">
               <a:rPr lang="fr-FR" smtClean="0"/>
-              <a:t>05/09/2025</a:t>
+              <a:t>16/09/2025</a:t>
             </a:fld>
             <a:endParaRPr lang="fr-FR"/>
           </a:p>
@@ -2663,7 +2670,7 @@
           <a:p>
             <a:fld id="{CD467743-7149-468D-8631-B8D9925B4116}" type="datetimeFigureOut">
               <a:rPr lang="fr-FR" smtClean="0"/>
-              <a:t>05/09/2025</a:t>
+              <a:t>16/09/2025</a:t>
             </a:fld>
             <a:endParaRPr lang="fr-FR"/>
           </a:p>
@@ -2904,7 +2911,7 @@
           <a:p>
             <a:fld id="{CD467743-7149-468D-8631-B8D9925B4116}" type="datetimeFigureOut">
               <a:rPr lang="fr-FR" smtClean="0"/>
-              <a:t>05/09/2025</a:t>
+              <a:t>16/09/2025</a:t>
             </a:fld>
             <a:endParaRPr lang="fr-FR"/>
           </a:p>
@@ -3342,7 +3349,7 @@
           <a:bodyPr/>
           <a:lstStyle/>
           <a:p>
-            <a:endParaRPr lang="fr-FR"/>
+            <a:endParaRPr lang="fr-FR" dirty="0"/>
           </a:p>
         </p:txBody>
       </p:sp>
@@ -3375,6 +3382,1653 @@
     <p:extLst>
       <p:ext uri="{BB962C8B-B14F-4D97-AF65-F5344CB8AC3E}">
         <p14:creationId xmlns:p14="http://schemas.microsoft.com/office/powerpoint/2010/main" val="1664095354"/>
+      </p:ext>
+    </p:extLst>
+  </p:cSld>
+  <p:clrMapOvr>
+    <a:masterClrMapping/>
+  </p:clrMapOvr>
+</p:sld>
+</file>
+
+<file path=ppt/slides/slide2.xml><?xml version="1.0" encoding="utf-8"?>
+<p:sld xmlns:a="http://schemas.openxmlformats.org/drawingml/2006/main" xmlns:r="http://schemas.openxmlformats.org/officeDocument/2006/relationships" xmlns:p="http://schemas.openxmlformats.org/presentationml/2006/main">
+  <p:cSld>
+    <p:bg>
+      <p:bgPr>
+        <a:solidFill>
+          <a:schemeClr val="bg1"/>
+        </a:solidFill>
+        <a:effectLst/>
+      </p:bgPr>
+    </p:bg>
+    <p:spTree>
+      <p:nvGrpSpPr>
+        <p:cNvPr id="1" name=""/>
+        <p:cNvGrpSpPr/>
+        <p:nvPr/>
+      </p:nvGrpSpPr>
+      <p:grpSpPr>
+        <a:xfrm>
+          <a:off x="0" y="0"/>
+          <a:ext cx="0" cy="0"/>
+          <a:chOff x="0" y="0"/>
+          <a:chExt cx="0" cy="0"/>
+        </a:xfrm>
+      </p:grpSpPr>
+      <p:sp useBgFill="1">
+        <p:nvSpPr>
+          <p:cNvPr id="20" name="Rectangle 19">
+            <a:extLst>
+              <a:ext uri="{FF2B5EF4-FFF2-40B4-BE49-F238E27FC236}">
+                <a16:creationId xmlns:a16="http://schemas.microsoft.com/office/drawing/2014/main" id="{1DF91F20-B96F-4F77-AC3E-2CDD3BAA10C2}"/>
+              </a:ext>
+              <a:ext uri="{C183D7F6-B498-43B3-948B-1728B52AA6E4}">
+                <adec:decorative xmlns:adec="http://schemas.microsoft.com/office/drawing/2017/decorative" val="1"/>
+              </a:ext>
+            </a:extLst>
+          </p:cNvPr>
+          <p:cNvSpPr>
+            <a:spLocks noGrp="1" noRot="1" noChangeAspect="1" noMove="1" noResize="1" noEditPoints="1" noAdjustHandles="1" noChangeArrowheads="1" noChangeShapeType="1" noTextEdit="1"/>
+          </p:cNvSpPr>
+          <p:nvPr>
+            <p:extLst>
+              <p:ext uri="{386F3935-93C4-4BCD-93E2-E3B085C9AB24}">
+                <p16:designElem xmlns:p16="http://schemas.microsoft.com/office/powerpoint/2015/main" val="1"/>
+              </p:ext>
+            </p:extLst>
+          </p:nvPr>
+        </p:nvSpPr>
+        <p:spPr>
+          <a:xfrm>
+            <a:off x="-2" y="0"/>
+            <a:ext cx="12192004" cy="6858000"/>
+          </a:xfrm>
+          <a:prstGeom prst="rect">
+            <a:avLst/>
+          </a:prstGeom>
+          <a:ln>
+            <a:noFill/>
+          </a:ln>
+        </p:spPr>
+        <p:style>
+          <a:lnRef idx="2">
+            <a:schemeClr val="accent1">
+              <a:shade val="50000"/>
+            </a:schemeClr>
+          </a:lnRef>
+          <a:fillRef idx="1">
+            <a:schemeClr val="accent1"/>
+          </a:fillRef>
+          <a:effectRef idx="0">
+            <a:schemeClr val="accent1"/>
+          </a:effectRef>
+          <a:fontRef idx="minor">
+            <a:schemeClr val="lt1"/>
+          </a:fontRef>
+        </p:style>
+        <p:txBody>
+          <a:bodyPr rtlCol="0" anchor="ctr"/>
+          <a:lstStyle/>
+          <a:p>
+            <a:pPr algn="ctr"/>
+            <a:endParaRPr lang="en-US"/>
+          </a:p>
+        </p:txBody>
+      </p:sp>
+      <p:sp>
+        <p:nvSpPr>
+          <p:cNvPr id="22" name="Rectangle 21">
+            <a:extLst>
+              <a:ext uri="{FF2B5EF4-FFF2-40B4-BE49-F238E27FC236}">
+                <a16:creationId xmlns:a16="http://schemas.microsoft.com/office/drawing/2014/main" id="{C3D487F7-9050-4871-B351-34A72ADB296C}"/>
+              </a:ext>
+              <a:ext uri="{C183D7F6-B498-43B3-948B-1728B52AA6E4}">
+                <adec:decorative xmlns:adec="http://schemas.microsoft.com/office/drawing/2017/decorative" val="1"/>
+              </a:ext>
+            </a:extLst>
+          </p:cNvPr>
+          <p:cNvSpPr>
+            <a:spLocks noGrp="1" noRot="1" noChangeAspect="1" noMove="1" noResize="1" noEditPoints="1" noAdjustHandles="1" noChangeArrowheads="1" noChangeShapeType="1" noTextEdit="1"/>
+          </p:cNvSpPr>
+          <p:nvPr>
+            <p:extLst>
+              <p:ext uri="{386F3935-93C4-4BCD-93E2-E3B085C9AB24}">
+                <p16:designElem xmlns:p16="http://schemas.microsoft.com/office/powerpoint/2015/main" val="1"/>
+              </p:ext>
+            </p:extLst>
+          </p:nvPr>
+        </p:nvSpPr>
+        <p:spPr>
+          <a:xfrm rot="10800000" flipH="1">
+            <a:off x="-484" y="-1"/>
+            <a:ext cx="8111296" cy="6858000"/>
+          </a:xfrm>
+          <a:prstGeom prst="rect">
+            <a:avLst/>
+          </a:prstGeom>
+          <a:gradFill>
+            <a:gsLst>
+              <a:gs pos="8000">
+                <a:srgbClr val="000000">
+                  <a:alpha val="94000"/>
+                </a:srgbClr>
+              </a:gs>
+              <a:gs pos="100000">
+                <a:schemeClr val="accent1"/>
+              </a:gs>
+            </a:gsLst>
+            <a:lin ang="2400000" scaled="0"/>
+          </a:gradFill>
+          <a:ln>
+            <a:noFill/>
+          </a:ln>
+        </p:spPr>
+        <p:style>
+          <a:lnRef idx="2">
+            <a:schemeClr val="accent1">
+              <a:shade val="50000"/>
+            </a:schemeClr>
+          </a:lnRef>
+          <a:fillRef idx="1">
+            <a:schemeClr val="accent1"/>
+          </a:fillRef>
+          <a:effectRef idx="0">
+            <a:schemeClr val="accent1"/>
+          </a:effectRef>
+          <a:fontRef idx="minor">
+            <a:schemeClr val="lt1"/>
+          </a:fontRef>
+        </p:style>
+        <p:txBody>
+          <a:bodyPr rtlCol="0" anchor="ctr"/>
+          <a:lstStyle/>
+          <a:p>
+            <a:pPr algn="ctr"/>
+            <a:endParaRPr lang="en-US"/>
+          </a:p>
+        </p:txBody>
+      </p:sp>
+      <p:sp>
+        <p:nvSpPr>
+          <p:cNvPr id="24" name="Rectangle 23">
+            <a:extLst>
+              <a:ext uri="{FF2B5EF4-FFF2-40B4-BE49-F238E27FC236}">
+                <a16:creationId xmlns:a16="http://schemas.microsoft.com/office/drawing/2014/main" id="{F43C27DD-EF6A-4C48-9669-C2970E71A814}"/>
+              </a:ext>
+              <a:ext uri="{C183D7F6-B498-43B3-948B-1728B52AA6E4}">
+                <adec:decorative xmlns:adec="http://schemas.microsoft.com/office/drawing/2017/decorative" val="1"/>
+              </a:ext>
+            </a:extLst>
+          </p:cNvPr>
+          <p:cNvSpPr>
+            <a:spLocks noGrp="1" noRot="1" noChangeAspect="1" noMove="1" noResize="1" noEditPoints="1" noAdjustHandles="1" noChangeArrowheads="1" noChangeShapeType="1" noTextEdit="1"/>
+          </p:cNvSpPr>
+          <p:nvPr>
+            <p:extLst>
+              <p:ext uri="{386F3935-93C4-4BCD-93E2-E3B085C9AB24}">
+                <p16:designElem xmlns:p16="http://schemas.microsoft.com/office/powerpoint/2015/main" val="1"/>
+              </p:ext>
+            </p:extLst>
+          </p:nvPr>
+        </p:nvSpPr>
+        <p:spPr>
+          <a:xfrm rot="16200000" flipH="1">
+            <a:off x="858281" y="-401562"/>
+            <a:ext cx="6858004" cy="7661129"/>
+          </a:xfrm>
+          <a:prstGeom prst="rect">
+            <a:avLst/>
+          </a:prstGeom>
+          <a:gradFill>
+            <a:gsLst>
+              <a:gs pos="0">
+                <a:schemeClr val="accent1">
+                  <a:alpha val="23000"/>
+                </a:schemeClr>
+              </a:gs>
+              <a:gs pos="71000">
+                <a:schemeClr val="accent1">
+                  <a:lumMod val="50000"/>
+                  <a:alpha val="0"/>
+                </a:schemeClr>
+              </a:gs>
+              <a:gs pos="100000">
+                <a:srgbClr val="000000">
+                  <a:alpha val="0"/>
+                </a:srgbClr>
+              </a:gs>
+            </a:gsLst>
+            <a:lin ang="8400000" scaled="0"/>
+          </a:gradFill>
+          <a:ln>
+            <a:noFill/>
+          </a:ln>
+        </p:spPr>
+        <p:style>
+          <a:lnRef idx="2">
+            <a:schemeClr val="accent1">
+              <a:shade val="50000"/>
+            </a:schemeClr>
+          </a:lnRef>
+          <a:fillRef idx="1">
+            <a:schemeClr val="accent1"/>
+          </a:fillRef>
+          <a:effectRef idx="0">
+            <a:schemeClr val="accent1"/>
+          </a:effectRef>
+          <a:fontRef idx="minor">
+            <a:schemeClr val="lt1"/>
+          </a:fontRef>
+        </p:style>
+        <p:txBody>
+          <a:bodyPr rtlCol="0" anchor="ctr"/>
+          <a:lstStyle/>
+          <a:p>
+            <a:pPr algn="ctr"/>
+            <a:endParaRPr lang="en-US" dirty="0"/>
+          </a:p>
+        </p:txBody>
+      </p:sp>
+      <p:sp>
+        <p:nvSpPr>
+          <p:cNvPr id="26" name="Rectangle 25">
+            <a:extLst>
+              <a:ext uri="{FF2B5EF4-FFF2-40B4-BE49-F238E27FC236}">
+                <a16:creationId xmlns:a16="http://schemas.microsoft.com/office/drawing/2014/main" id="{C84384FE-1C88-4CAA-8FB8-2313A3AE734D}"/>
+              </a:ext>
+              <a:ext uri="{C183D7F6-B498-43B3-948B-1728B52AA6E4}">
+                <adec:decorative xmlns:adec="http://schemas.microsoft.com/office/drawing/2017/decorative" val="1"/>
+              </a:ext>
+            </a:extLst>
+          </p:cNvPr>
+          <p:cNvSpPr>
+            <a:spLocks noGrp="1" noRot="1" noChangeAspect="1" noMove="1" noResize="1" noEditPoints="1" noAdjustHandles="1" noChangeArrowheads="1" noChangeShapeType="1" noTextEdit="1"/>
+          </p:cNvSpPr>
+          <p:nvPr>
+            <p:extLst>
+              <p:ext uri="{386F3935-93C4-4BCD-93E2-E3B085C9AB24}">
+                <p16:designElem xmlns:p16="http://schemas.microsoft.com/office/powerpoint/2015/main" val="1"/>
+              </p:ext>
+            </p:extLst>
+          </p:nvPr>
+        </p:nvSpPr>
+        <p:spPr>
+          <a:xfrm rot="10800000" flipH="1">
+            <a:off x="-7519" y="-1"/>
+            <a:ext cx="8118331" cy="6858000"/>
+          </a:xfrm>
+          <a:prstGeom prst="rect">
+            <a:avLst/>
+          </a:prstGeom>
+          <a:gradFill>
+            <a:gsLst>
+              <a:gs pos="14000">
+                <a:schemeClr val="accent1">
+                  <a:alpha val="0"/>
+                </a:schemeClr>
+              </a:gs>
+              <a:gs pos="100000">
+                <a:srgbClr val="000000">
+                  <a:alpha val="82000"/>
+                </a:srgbClr>
+              </a:gs>
+            </a:gsLst>
+            <a:lin ang="4200000" scaled="0"/>
+          </a:gradFill>
+          <a:ln>
+            <a:noFill/>
+          </a:ln>
+        </p:spPr>
+        <p:style>
+          <a:lnRef idx="2">
+            <a:schemeClr val="accent1">
+              <a:shade val="50000"/>
+            </a:schemeClr>
+          </a:lnRef>
+          <a:fillRef idx="1">
+            <a:schemeClr val="accent1"/>
+          </a:fillRef>
+          <a:effectRef idx="0">
+            <a:schemeClr val="accent1"/>
+          </a:effectRef>
+          <a:fontRef idx="minor">
+            <a:schemeClr val="lt1"/>
+          </a:fontRef>
+        </p:style>
+        <p:txBody>
+          <a:bodyPr rtlCol="0" anchor="ctr"/>
+          <a:lstStyle/>
+          <a:p>
+            <a:pPr algn="ctr"/>
+            <a:endParaRPr lang="en-US" dirty="0"/>
+          </a:p>
+        </p:txBody>
+      </p:sp>
+      <p:sp>
+        <p:nvSpPr>
+          <p:cNvPr id="28" name="Oval 27">
+            <a:extLst>
+              <a:ext uri="{FF2B5EF4-FFF2-40B4-BE49-F238E27FC236}">
+                <a16:creationId xmlns:a16="http://schemas.microsoft.com/office/drawing/2014/main" id="{87B6A113-58CD-406C-BCE4-6E1F1F2BE696}"/>
+              </a:ext>
+              <a:ext uri="{C183D7F6-B498-43B3-948B-1728B52AA6E4}">
+                <adec:decorative xmlns:adec="http://schemas.microsoft.com/office/drawing/2017/decorative" val="1"/>
+              </a:ext>
+            </a:extLst>
+          </p:cNvPr>
+          <p:cNvSpPr>
+            <a:spLocks noGrp="1" noRot="1" noChangeAspect="1" noMove="1" noResize="1" noEditPoints="1" noAdjustHandles="1" noChangeArrowheads="1" noChangeShapeType="1" noTextEdit="1"/>
+          </p:cNvSpPr>
+          <p:nvPr>
+            <p:extLst>
+              <p:ext uri="{386F3935-93C4-4BCD-93E2-E3B085C9AB24}">
+                <p16:designElem xmlns:p16="http://schemas.microsoft.com/office/powerpoint/2015/main" val="1"/>
+              </p:ext>
+            </p:extLst>
+          </p:nvPr>
+        </p:nvSpPr>
+        <p:spPr>
+          <a:xfrm rot="15449520">
+            <a:off x="2569700" y="983306"/>
+            <a:ext cx="5005754" cy="5005754"/>
+          </a:xfrm>
+          <a:prstGeom prst="ellipse">
+            <a:avLst/>
+          </a:prstGeom>
+          <a:gradFill>
+            <a:gsLst>
+              <a:gs pos="17000">
+                <a:schemeClr val="accent1">
+                  <a:lumMod val="75000"/>
+                  <a:alpha val="0"/>
+                </a:schemeClr>
+              </a:gs>
+              <a:gs pos="82000">
+                <a:srgbClr val="000000">
+                  <a:alpha val="24000"/>
+                </a:srgbClr>
+              </a:gs>
+            </a:gsLst>
+            <a:lin ang="9000000" scaled="0"/>
+          </a:gradFill>
+          <a:ln>
+            <a:noFill/>
+          </a:ln>
+        </p:spPr>
+        <p:style>
+          <a:lnRef idx="2">
+            <a:schemeClr val="accent1">
+              <a:shade val="50000"/>
+            </a:schemeClr>
+          </a:lnRef>
+          <a:fillRef idx="1">
+            <a:schemeClr val="accent1"/>
+          </a:fillRef>
+          <a:effectRef idx="0">
+            <a:schemeClr val="accent1"/>
+          </a:effectRef>
+          <a:fontRef idx="minor">
+            <a:schemeClr val="lt1"/>
+          </a:fontRef>
+        </p:style>
+        <p:txBody>
+          <a:bodyPr rtlCol="0" anchor="ctr"/>
+          <a:lstStyle/>
+          <a:p>
+            <a:pPr algn="ctr"/>
+            <a:endParaRPr lang="en-US" dirty="0"/>
+          </a:p>
+        </p:txBody>
+      </p:sp>
+      <p:sp>
+        <p:nvSpPr>
+          <p:cNvPr id="2" name="Titre 1">
+            <a:extLst>
+              <a:ext uri="{FF2B5EF4-FFF2-40B4-BE49-F238E27FC236}">
+                <a16:creationId xmlns:a16="http://schemas.microsoft.com/office/drawing/2014/main" id="{41ED33EF-C029-9B2C-C2EC-CAED1E7D0C3E}"/>
+              </a:ext>
+            </a:extLst>
+          </p:cNvPr>
+          <p:cNvSpPr>
+            <a:spLocks noGrp="1"/>
+          </p:cNvSpPr>
+          <p:nvPr>
+            <p:ph type="title"/>
+          </p:nvPr>
+        </p:nvSpPr>
+        <p:spPr>
+          <a:xfrm>
+            <a:off x="1011948" y="857251"/>
+            <a:ext cx="6219582" cy="3160113"/>
+          </a:xfrm>
+        </p:spPr>
+        <p:txBody>
+          <a:bodyPr vert="horz" lIns="91440" tIns="45720" rIns="91440" bIns="45720" rtlCol="0" anchor="b">
+            <a:normAutofit/>
+          </a:bodyPr>
+          <a:lstStyle/>
+          <a:p>
+            <a:r>
+              <a:rPr lang="en-US" sz="4800" kern="1200">
+                <a:solidFill>
+                  <a:srgbClr val="FFFFFF"/>
+                </a:solidFill>
+                <a:latin typeface="+mj-lt"/>
+                <a:ea typeface="+mj-ea"/>
+                <a:cs typeface="+mj-cs"/>
+              </a:rPr>
+              <a:t>Le Co-learning</a:t>
+            </a:r>
+          </a:p>
+        </p:txBody>
+      </p:sp>
+      <p:sp>
+        <p:nvSpPr>
+          <p:cNvPr id="30" name="Rectangle 29">
+            <a:extLst>
+              <a:ext uri="{FF2B5EF4-FFF2-40B4-BE49-F238E27FC236}">
+                <a16:creationId xmlns:a16="http://schemas.microsoft.com/office/drawing/2014/main" id="{05A1AA86-B7E6-4C02-AA34-F1A25CD4CCBD}"/>
+              </a:ext>
+              <a:ext uri="{C183D7F6-B498-43B3-948B-1728B52AA6E4}">
+                <adec:decorative xmlns:adec="http://schemas.microsoft.com/office/drawing/2017/decorative" val="1"/>
+              </a:ext>
+            </a:extLst>
+          </p:cNvPr>
+          <p:cNvSpPr>
+            <a:spLocks noGrp="1" noRot="1" noChangeAspect="1" noMove="1" noResize="1" noEditPoints="1" noAdjustHandles="1" noChangeArrowheads="1" noChangeShapeType="1" noTextEdit="1"/>
+          </p:cNvSpPr>
+          <p:nvPr>
+            <p:extLst>
+              <p:ext uri="{386F3935-93C4-4BCD-93E2-E3B085C9AB24}">
+                <p16:designElem xmlns:p16="http://schemas.microsoft.com/office/powerpoint/2015/main" val="1"/>
+              </p:ext>
+            </p:extLst>
+          </p:nvPr>
+        </p:nvSpPr>
+        <p:spPr>
+          <a:xfrm rot="10800000" flipH="1">
+            <a:off x="-7518" y="4354178"/>
+            <a:ext cx="8118330" cy="2503817"/>
+          </a:xfrm>
+          <a:prstGeom prst="rect">
+            <a:avLst/>
+          </a:prstGeom>
+          <a:gradFill>
+            <a:gsLst>
+              <a:gs pos="0">
+                <a:schemeClr val="accent1">
+                  <a:lumMod val="75000"/>
+                  <a:alpha val="33000"/>
+                </a:schemeClr>
+              </a:gs>
+              <a:gs pos="83000">
+                <a:srgbClr val="000000">
+                  <a:alpha val="21000"/>
+                </a:srgbClr>
+              </a:gs>
+            </a:gsLst>
+            <a:lin ang="8400000" scaled="0"/>
+          </a:gradFill>
+          <a:ln>
+            <a:noFill/>
+          </a:ln>
+        </p:spPr>
+        <p:style>
+          <a:lnRef idx="2">
+            <a:schemeClr val="accent1">
+              <a:shade val="50000"/>
+            </a:schemeClr>
+          </a:lnRef>
+          <a:fillRef idx="1">
+            <a:schemeClr val="accent1"/>
+          </a:fillRef>
+          <a:effectRef idx="0">
+            <a:schemeClr val="accent1"/>
+          </a:effectRef>
+          <a:fontRef idx="minor">
+            <a:schemeClr val="lt1"/>
+          </a:fontRef>
+        </p:style>
+        <p:txBody>
+          <a:bodyPr rtlCol="0" anchor="ctr"/>
+          <a:lstStyle/>
+          <a:p>
+            <a:pPr algn="ctr"/>
+            <a:endParaRPr lang="en-US" dirty="0"/>
+          </a:p>
+        </p:txBody>
+      </p:sp>
+      <p:pic>
+        <p:nvPicPr>
+          <p:cNvPr id="4" name="Espace réservé du contenu 3" descr="Une image contenant texte, capture d’écran, Police, Rectangle&#10;&#10;Le contenu généré par l’IA peut être incorrect.">
+            <a:extLst>
+              <a:ext uri="{FF2B5EF4-FFF2-40B4-BE49-F238E27FC236}">
+                <a16:creationId xmlns:a16="http://schemas.microsoft.com/office/drawing/2014/main" id="{F401D835-4EA5-E9DA-3880-AEEAC28DD202}"/>
+              </a:ext>
+            </a:extLst>
+          </p:cNvPr>
+          <p:cNvPicPr>
+            <a:picLocks noChangeAspect="1"/>
+          </p:cNvPicPr>
+          <p:nvPr/>
+        </p:nvPicPr>
+        <p:blipFill>
+          <a:blip r:embed="rId2">
+            <a:extLst>
+              <a:ext uri="{28A0092B-C50C-407E-A947-70E740481C1C}">
+                <a14:useLocalDpi xmlns:a14="http://schemas.microsoft.com/office/drawing/2010/main" val="0"/>
+              </a:ext>
+            </a:extLst>
+          </a:blip>
+          <a:stretch>
+            <a:fillRect/>
+          </a:stretch>
+        </p:blipFill>
+        <p:spPr bwMode="auto">
+          <a:xfrm>
+            <a:off x="9039010" y="457200"/>
+            <a:ext cx="2217760" cy="5943600"/>
+          </a:xfrm>
+          <a:prstGeom prst="rect">
+            <a:avLst/>
+          </a:prstGeom>
+          <a:noFill/>
+        </p:spPr>
+      </p:pic>
+    </p:spTree>
+    <p:extLst>
+      <p:ext uri="{BB962C8B-B14F-4D97-AF65-F5344CB8AC3E}">
+        <p14:creationId xmlns:p14="http://schemas.microsoft.com/office/powerpoint/2010/main" val="1603024392"/>
+      </p:ext>
+    </p:extLst>
+  </p:cSld>
+  <p:clrMapOvr>
+    <a:masterClrMapping/>
+  </p:clrMapOvr>
+</p:sld>
+</file>
+
+<file path=ppt/slides/slide3.xml><?xml version="1.0" encoding="utf-8"?>
+<p:sld xmlns:a="http://schemas.openxmlformats.org/drawingml/2006/main" xmlns:r="http://schemas.openxmlformats.org/officeDocument/2006/relationships" xmlns:p="http://schemas.openxmlformats.org/presentationml/2006/main">
+  <p:cSld>
+    <p:bg>
+      <p:bgPr>
+        <a:solidFill>
+          <a:schemeClr val="bg1"/>
+        </a:solidFill>
+        <a:effectLst/>
+      </p:bgPr>
+    </p:bg>
+    <p:spTree>
+      <p:nvGrpSpPr>
+        <p:cNvPr id="1" name=""/>
+        <p:cNvGrpSpPr/>
+        <p:nvPr/>
+      </p:nvGrpSpPr>
+      <p:grpSpPr>
+        <a:xfrm>
+          <a:off x="0" y="0"/>
+          <a:ext cx="0" cy="0"/>
+          <a:chOff x="0" y="0"/>
+          <a:chExt cx="0" cy="0"/>
+        </a:xfrm>
+      </p:grpSpPr>
+      <p:sp useBgFill="1">
+        <p:nvSpPr>
+          <p:cNvPr id="41" name="Rectangle 40">
+            <a:extLst>
+              <a:ext uri="{FF2B5EF4-FFF2-40B4-BE49-F238E27FC236}">
+                <a16:creationId xmlns:a16="http://schemas.microsoft.com/office/drawing/2014/main" id="{A8384FB5-9ADC-4DDC-881B-597D56F5B15D}"/>
+              </a:ext>
+              <a:ext uri="{C183D7F6-B498-43B3-948B-1728B52AA6E4}">
+                <adec:decorative xmlns:adec="http://schemas.microsoft.com/office/drawing/2017/decorative" val="1"/>
+              </a:ext>
+            </a:extLst>
+          </p:cNvPr>
+          <p:cNvSpPr>
+            <a:spLocks noGrp="1" noRot="1" noChangeAspect="1" noMove="1" noResize="1" noEditPoints="1" noAdjustHandles="1" noChangeArrowheads="1" noChangeShapeType="1" noTextEdit="1"/>
+          </p:cNvSpPr>
+          <p:nvPr>
+            <p:extLst>
+              <p:ext uri="{386F3935-93C4-4BCD-93E2-E3B085C9AB24}">
+                <p16:designElem xmlns:p16="http://schemas.microsoft.com/office/powerpoint/2015/main" val="1"/>
+              </p:ext>
+            </p:extLst>
+          </p:nvPr>
+        </p:nvSpPr>
+        <p:spPr>
+          <a:xfrm>
+            <a:off x="0" y="0"/>
+            <a:ext cx="12192000" cy="6858000"/>
+          </a:xfrm>
+          <a:prstGeom prst="rect">
+            <a:avLst/>
+          </a:prstGeom>
+          <a:ln w="12700" cap="flat" cmpd="sng" algn="ctr">
+            <a:noFill/>
+            <a:prstDash val="solid"/>
+            <a:miter lim="800000"/>
+          </a:ln>
+          <a:effectLst/>
+          <a:extLst>
+            <a:ext uri="{91240B29-F687-4F45-9708-019B960494DF}">
+              <a14:hiddenLine xmlns:a14="http://schemas.microsoft.com/office/drawing/2010/main" w="12700" cap="flat" cmpd="sng" algn="ctr">
+                <a:solidFill>
+                  <a:schemeClr val="accent1">
+                    <a:shade val="50000"/>
+                  </a:schemeClr>
+                </a:solidFill>
+                <a:prstDash val="solid"/>
+                <a:miter lim="800000"/>
+              </a14:hiddenLine>
+            </a:ext>
+          </a:extLst>
+        </p:spPr>
+        <p:style>
+          <a:lnRef idx="2">
+            <a:schemeClr val="accent1">
+              <a:shade val="50000"/>
+            </a:schemeClr>
+          </a:lnRef>
+          <a:fillRef idx="1">
+            <a:schemeClr val="accent1"/>
+          </a:fillRef>
+          <a:effectRef idx="0">
+            <a:schemeClr val="accent1"/>
+          </a:effectRef>
+          <a:fontRef idx="minor">
+            <a:schemeClr val="lt1"/>
+          </a:fontRef>
+        </p:style>
+        <p:txBody>
+          <a:bodyPr rtlCol="0" anchor="ctr"/>
+          <a:lstStyle/>
+          <a:p>
+            <a:pPr algn="ctr"/>
+            <a:endParaRPr lang="en-US"/>
+          </a:p>
+        </p:txBody>
+      </p:sp>
+      <p:sp>
+        <p:nvSpPr>
+          <p:cNvPr id="42" name="Rectangle 41">
+            <a:extLst>
+              <a:ext uri="{FF2B5EF4-FFF2-40B4-BE49-F238E27FC236}">
+                <a16:creationId xmlns:a16="http://schemas.microsoft.com/office/drawing/2014/main" id="{1199E1B1-A8C0-4FE8-A5A8-1CB41D69F857}"/>
+              </a:ext>
+              <a:ext uri="{C183D7F6-B498-43B3-948B-1728B52AA6E4}">
+                <adec:decorative xmlns:adec="http://schemas.microsoft.com/office/drawing/2017/decorative" val="1"/>
+              </a:ext>
+            </a:extLst>
+          </p:cNvPr>
+          <p:cNvSpPr>
+            <a:spLocks noGrp="1" noRot="1" noChangeAspect="1" noMove="1" noResize="1" noEditPoints="1" noAdjustHandles="1" noChangeArrowheads="1" noChangeShapeType="1" noTextEdit="1"/>
+          </p:cNvSpPr>
+          <p:nvPr>
+            <p:extLst>
+              <p:ext uri="{386F3935-93C4-4BCD-93E2-E3B085C9AB24}">
+                <p16:designElem xmlns:p16="http://schemas.microsoft.com/office/powerpoint/2015/main" val="1"/>
+              </p:ext>
+            </p:extLst>
+          </p:nvPr>
+        </p:nvSpPr>
+        <p:spPr>
+          <a:xfrm rot="10800000" flipH="1">
+            <a:off x="2" y="0"/>
+            <a:ext cx="12191998" cy="1575955"/>
+          </a:xfrm>
+          <a:prstGeom prst="rect">
+            <a:avLst/>
+          </a:prstGeom>
+          <a:gradFill>
+            <a:gsLst>
+              <a:gs pos="0">
+                <a:srgbClr val="000000">
+                  <a:alpha val="96000"/>
+                </a:srgbClr>
+              </a:gs>
+              <a:gs pos="100000">
+                <a:schemeClr val="accent1">
+                  <a:lumMod val="75000"/>
+                </a:schemeClr>
+              </a:gs>
+            </a:gsLst>
+            <a:lin ang="6000000" scaled="0"/>
+          </a:gradFill>
+          <a:ln>
+            <a:noFill/>
+          </a:ln>
+        </p:spPr>
+        <p:style>
+          <a:lnRef idx="2">
+            <a:schemeClr val="accent1">
+              <a:shade val="50000"/>
+            </a:schemeClr>
+          </a:lnRef>
+          <a:fillRef idx="1">
+            <a:schemeClr val="accent1"/>
+          </a:fillRef>
+          <a:effectRef idx="0">
+            <a:schemeClr val="accent1"/>
+          </a:effectRef>
+          <a:fontRef idx="minor">
+            <a:schemeClr val="lt1"/>
+          </a:fontRef>
+        </p:style>
+        <p:txBody>
+          <a:bodyPr rtlCol="0" anchor="ctr"/>
+          <a:lstStyle/>
+          <a:p>
+            <a:pPr algn="ctr"/>
+            <a:endParaRPr lang="en-US"/>
+          </a:p>
+        </p:txBody>
+      </p:sp>
+      <p:sp>
+        <p:nvSpPr>
+          <p:cNvPr id="43" name="Rectangle 42">
+            <a:extLst>
+              <a:ext uri="{FF2B5EF4-FFF2-40B4-BE49-F238E27FC236}">
+                <a16:creationId xmlns:a16="http://schemas.microsoft.com/office/drawing/2014/main" id="{84A8DE83-DE75-4B41-9DB4-A7EC0B0DEC0B}"/>
+              </a:ext>
+              <a:ext uri="{C183D7F6-B498-43B3-948B-1728B52AA6E4}">
+                <adec:decorative xmlns:adec="http://schemas.microsoft.com/office/drawing/2017/decorative" val="1"/>
+              </a:ext>
+            </a:extLst>
+          </p:cNvPr>
+          <p:cNvSpPr>
+            <a:spLocks noGrp="1" noRot="1" noChangeAspect="1" noMove="1" noResize="1" noEditPoints="1" noAdjustHandles="1" noChangeArrowheads="1" noChangeShapeType="1" noTextEdit="1"/>
+          </p:cNvSpPr>
+          <p:nvPr>
+            <p:extLst>
+              <p:ext uri="{386F3935-93C4-4BCD-93E2-E3B085C9AB24}">
+                <p16:designElem xmlns:p16="http://schemas.microsoft.com/office/powerpoint/2015/main" val="1"/>
+              </p:ext>
+            </p:extLst>
+          </p:nvPr>
+        </p:nvSpPr>
+        <p:spPr>
+          <a:xfrm>
+            <a:off x="0" y="0"/>
+            <a:ext cx="8128856" cy="1575461"/>
+          </a:xfrm>
+          <a:prstGeom prst="rect">
+            <a:avLst/>
+          </a:prstGeom>
+          <a:gradFill>
+            <a:gsLst>
+              <a:gs pos="0">
+                <a:schemeClr val="accent1">
+                  <a:alpha val="41000"/>
+                </a:schemeClr>
+              </a:gs>
+              <a:gs pos="74000">
+                <a:schemeClr val="accent1">
+                  <a:lumMod val="60000"/>
+                  <a:lumOff val="40000"/>
+                  <a:alpha val="0"/>
+                </a:schemeClr>
+              </a:gs>
+            </a:gsLst>
+            <a:lin ang="8400000" scaled="0"/>
+          </a:gradFill>
+          <a:ln>
+            <a:noFill/>
+          </a:ln>
+        </p:spPr>
+        <p:style>
+          <a:lnRef idx="2">
+            <a:schemeClr val="accent1">
+              <a:shade val="50000"/>
+            </a:schemeClr>
+          </a:lnRef>
+          <a:fillRef idx="1">
+            <a:schemeClr val="accent1"/>
+          </a:fillRef>
+          <a:effectRef idx="0">
+            <a:schemeClr val="accent1"/>
+          </a:effectRef>
+          <a:fontRef idx="minor">
+            <a:schemeClr val="lt1"/>
+          </a:fontRef>
+        </p:style>
+        <p:txBody>
+          <a:bodyPr rtlCol="0" anchor="ctr"/>
+          <a:lstStyle/>
+          <a:p>
+            <a:pPr algn="ctr"/>
+            <a:endParaRPr lang="en-US"/>
+          </a:p>
+        </p:txBody>
+      </p:sp>
+      <p:sp>
+        <p:nvSpPr>
+          <p:cNvPr id="44" name="Rectangle 43">
+            <a:extLst>
+              <a:ext uri="{FF2B5EF4-FFF2-40B4-BE49-F238E27FC236}">
+                <a16:creationId xmlns:a16="http://schemas.microsoft.com/office/drawing/2014/main" id="{A7009A0A-BEF5-4EAC-AF15-E4F9F002E239}"/>
+              </a:ext>
+              <a:ext uri="{C183D7F6-B498-43B3-948B-1728B52AA6E4}">
+                <adec:decorative xmlns:adec="http://schemas.microsoft.com/office/drawing/2017/decorative" val="1"/>
+              </a:ext>
+            </a:extLst>
+          </p:cNvPr>
+          <p:cNvSpPr>
+            <a:spLocks noGrp="1" noRot="1" noChangeAspect="1" noMove="1" noResize="1" noEditPoints="1" noAdjustHandles="1" noChangeArrowheads="1" noChangeShapeType="1" noTextEdit="1"/>
+          </p:cNvSpPr>
+          <p:nvPr>
+            <p:extLst>
+              <p:ext uri="{386F3935-93C4-4BCD-93E2-E3B085C9AB24}">
+                <p16:designElem xmlns:p16="http://schemas.microsoft.com/office/powerpoint/2015/main" val="1"/>
+              </p:ext>
+            </p:extLst>
+          </p:nvPr>
+        </p:nvSpPr>
+        <p:spPr>
+          <a:xfrm flipH="1">
+            <a:off x="-3" y="-1"/>
+            <a:ext cx="12192002" cy="1574311"/>
+          </a:xfrm>
+          <a:prstGeom prst="rect">
+            <a:avLst/>
+          </a:prstGeom>
+          <a:gradFill>
+            <a:gsLst>
+              <a:gs pos="0">
+                <a:srgbClr val="000000">
+                  <a:alpha val="63000"/>
+                </a:srgbClr>
+              </a:gs>
+              <a:gs pos="78000">
+                <a:schemeClr val="accent1">
+                  <a:alpha val="15000"/>
+                </a:schemeClr>
+              </a:gs>
+            </a:gsLst>
+            <a:lin ang="15600000" scaled="0"/>
+          </a:gradFill>
+          <a:ln>
+            <a:noFill/>
+          </a:ln>
+        </p:spPr>
+        <p:style>
+          <a:lnRef idx="2">
+            <a:schemeClr val="accent1">
+              <a:shade val="50000"/>
+            </a:schemeClr>
+          </a:lnRef>
+          <a:fillRef idx="1">
+            <a:schemeClr val="accent1"/>
+          </a:fillRef>
+          <a:effectRef idx="0">
+            <a:schemeClr val="accent1"/>
+          </a:effectRef>
+          <a:fontRef idx="minor">
+            <a:schemeClr val="lt1"/>
+          </a:fontRef>
+        </p:style>
+        <p:txBody>
+          <a:bodyPr rtlCol="0" anchor="ctr"/>
+          <a:lstStyle/>
+          <a:p>
+            <a:pPr algn="ctr"/>
+            <a:endParaRPr lang="en-US"/>
+          </a:p>
+        </p:txBody>
+      </p:sp>
+      <p:sp>
+        <p:nvSpPr>
+          <p:cNvPr id="3" name="ZoneTexte 2">
+            <a:extLst>
+              <a:ext uri="{FF2B5EF4-FFF2-40B4-BE49-F238E27FC236}">
+                <a16:creationId xmlns:a16="http://schemas.microsoft.com/office/drawing/2014/main" id="{777EA4B7-0DBF-872B-1E7B-50471FB77089}"/>
+              </a:ext>
+            </a:extLst>
+          </p:cNvPr>
+          <p:cNvSpPr txBox="1"/>
+          <p:nvPr/>
+        </p:nvSpPr>
+        <p:spPr>
+          <a:xfrm>
+            <a:off x="699713" y="248038"/>
+            <a:ext cx="7063721" cy="1159200"/>
+          </a:xfrm>
+          <a:prstGeom prst="rect">
+            <a:avLst/>
+          </a:prstGeom>
+        </p:spPr>
+        <p:txBody>
+          <a:bodyPr vert="horz" lIns="91440" tIns="45720" rIns="91440" bIns="45720" rtlCol="0" anchor="ctr">
+            <a:normAutofit/>
+          </a:bodyPr>
+          <a:lstStyle/>
+          <a:p>
+            <a:pPr>
+              <a:lnSpc>
+                <a:spcPct val="90000"/>
+              </a:lnSpc>
+              <a:spcBef>
+                <a:spcPct val="0"/>
+              </a:spcBef>
+              <a:spcAft>
+                <a:spcPts val="600"/>
+              </a:spcAft>
+            </a:pPr>
+            <a:r>
+              <a:rPr lang="en-US" sz="3700" kern="1200">
+                <a:solidFill>
+                  <a:srgbClr val="FFFFFF"/>
+                </a:solidFill>
+                <a:latin typeface="+mj-lt"/>
+                <a:ea typeface="+mj-ea"/>
+                <a:cs typeface="+mj-cs"/>
+              </a:rPr>
+              <a:t>objectifs du co-learning multimodal</a:t>
+            </a:r>
+          </a:p>
+        </p:txBody>
+      </p:sp>
+      <p:graphicFrame>
+        <p:nvGraphicFramePr>
+          <p:cNvPr id="2" name="Tableau 1">
+            <a:extLst>
+              <a:ext uri="{FF2B5EF4-FFF2-40B4-BE49-F238E27FC236}">
+                <a16:creationId xmlns:a16="http://schemas.microsoft.com/office/drawing/2014/main" id="{8A86A2A0-472C-48CF-7C71-1A5A7C1A114A}"/>
+              </a:ext>
+            </a:extLst>
+          </p:cNvPr>
+          <p:cNvGraphicFramePr>
+            <a:graphicFrameLocks noGrp="1"/>
+          </p:cNvGraphicFramePr>
+          <p:nvPr>
+            <p:extLst>
+              <p:ext uri="{D42A27DB-BD31-4B8C-83A1-F6EECF244321}">
+                <p14:modId xmlns:p14="http://schemas.microsoft.com/office/powerpoint/2010/main" val="2800862482"/>
+              </p:ext>
+            </p:extLst>
+          </p:nvPr>
+        </p:nvGraphicFramePr>
+        <p:xfrm>
+          <a:off x="432225" y="1981866"/>
+          <a:ext cx="11327549" cy="4421016"/>
+        </p:xfrm>
+        <a:graphic>
+          <a:graphicData uri="http://schemas.openxmlformats.org/drawingml/2006/table">
+            <a:tbl>
+              <a:tblPr firstRow="1" bandRow="1">
+                <a:noFill/>
+              </a:tblPr>
+              <a:tblGrid>
+                <a:gridCol w="2785352">
+                  <a:extLst>
+                    <a:ext uri="{9D8B030D-6E8A-4147-A177-3AD203B41FA5}">
+                      <a16:colId xmlns:a16="http://schemas.microsoft.com/office/drawing/2014/main" val="1658389980"/>
+                    </a:ext>
+                  </a:extLst>
+                </a:gridCol>
+                <a:gridCol w="8542197">
+                  <a:extLst>
+                    <a:ext uri="{9D8B030D-6E8A-4147-A177-3AD203B41FA5}">
+                      <a16:colId xmlns:a16="http://schemas.microsoft.com/office/drawing/2014/main" val="426916927"/>
+                    </a:ext>
+                  </a:extLst>
+                </a:gridCol>
+              </a:tblGrid>
+              <a:tr h="417924">
+                <a:tc>
+                  <a:txBody>
+                    <a:bodyPr/>
+                    <a:lstStyle/>
+                    <a:p>
+                      <a:pPr algn="l" fontAlgn="ctr">
+                        <a:buNone/>
+                      </a:pPr>
+                      <a:r>
+                        <a:rPr lang="es-AR" sz="1200" b="1" i="0" u="none" strike="noStrike" cap="all" spc="60" dirty="0" err="1">
+                          <a:solidFill>
+                            <a:schemeClr val="tx1"/>
+                          </a:solidFill>
+                          <a:effectLst/>
+                          <a:latin typeface="Calibri" panose="020F0502020204030204" pitchFamily="34" charset="0"/>
+                        </a:rPr>
+                        <a:t>Objectif</a:t>
+                      </a:r>
+                      <a:endParaRPr lang="es-AR" sz="1200" b="1" i="0" u="none" strike="noStrike" cap="all" spc="60" dirty="0">
+                        <a:solidFill>
+                          <a:schemeClr val="tx1"/>
+                        </a:solidFill>
+                        <a:effectLst/>
+                        <a:latin typeface="Calibri" panose="020F0502020204030204" pitchFamily="34" charset="0"/>
+                      </a:endParaRPr>
+                    </a:p>
+                  </a:txBody>
+                  <a:tcPr marL="96715" marR="28014" marT="94983" marB="94983" anchor="b">
+                    <a:lnL w="12700" cap="flat" cmpd="sng" algn="ctr">
+                      <a:solidFill>
+                        <a:schemeClr val="tx1"/>
+                      </a:solidFill>
+                      <a:prstDash val="solid"/>
+                    </a:lnL>
+                    <a:lnR w="12700" cmpd="sng">
+                      <a:noFill/>
+                      <a:prstDash val="solid"/>
+                    </a:lnR>
+                    <a:lnT w="12700" cmpd="sng">
+                      <a:noFill/>
+                    </a:lnT>
+                    <a:lnB w="12700" cmpd="sng">
+                      <a:noFill/>
+                      <a:prstDash val="solid"/>
+                    </a:lnB>
+                    <a:noFill/>
+                  </a:tcPr>
+                </a:tc>
+                <a:tc>
+                  <a:txBody>
+                    <a:bodyPr/>
+                    <a:lstStyle/>
+                    <a:p>
+                      <a:pPr algn="l" fontAlgn="ctr">
+                        <a:buNone/>
+                      </a:pPr>
+                      <a:r>
+                        <a:rPr lang="es-AR" sz="1200" b="1" i="0" u="none" strike="noStrike" cap="all" spc="60">
+                          <a:solidFill>
+                            <a:schemeClr val="tx1"/>
+                          </a:solidFill>
+                          <a:effectLst/>
+                          <a:latin typeface="Calibri" panose="020F0502020204030204" pitchFamily="34" charset="0"/>
+                        </a:rPr>
+                        <a:t>But</a:t>
+                      </a:r>
+                    </a:p>
+                  </a:txBody>
+                  <a:tcPr marL="96715" marR="28014" marT="94983" marB="94983" anchor="b">
+                    <a:lnL w="12700" cmpd="sng">
+                      <a:noFill/>
+                      <a:prstDash val="solid"/>
+                    </a:lnL>
+                    <a:lnR w="12700" cmpd="sng">
+                      <a:noFill/>
+                      <a:prstDash val="solid"/>
+                    </a:lnR>
+                    <a:lnT w="12700" cmpd="sng">
+                      <a:noFill/>
+                    </a:lnT>
+                    <a:lnB w="12700" cmpd="sng">
+                      <a:noFill/>
+                      <a:prstDash val="solid"/>
+                    </a:lnB>
+                    <a:noFill/>
+                  </a:tcPr>
+                </a:tc>
+                <a:extLst>
+                  <a:ext uri="{0D108BD9-81ED-4DB2-BD59-A6C34878D82A}">
+                    <a16:rowId xmlns:a16="http://schemas.microsoft.com/office/drawing/2014/main" val="3285917810"/>
+                  </a:ext>
+                </a:extLst>
+              </a:tr>
+              <a:tr h="667182">
+                <a:tc>
+                  <a:txBody>
+                    <a:bodyPr/>
+                    <a:lstStyle/>
+                    <a:p>
+                      <a:pPr algn="l" fontAlgn="ctr">
+                        <a:buNone/>
+                      </a:pPr>
+                      <a:r>
+                        <a:rPr lang="es-AR" sz="1700" b="0" i="0" u="none" strike="noStrike" cap="none" spc="0">
+                          <a:solidFill>
+                            <a:schemeClr val="tx1"/>
+                          </a:solidFill>
+                          <a:effectLst/>
+                          <a:latin typeface="Calibri" panose="020F0502020204030204" pitchFamily="34" charset="0"/>
+                        </a:rPr>
+                        <a:t>Présence de modalité</a:t>
+                      </a:r>
+                    </a:p>
+                  </a:txBody>
+                  <a:tcPr marL="96715" marR="28014" marT="27633" marB="94983" anchor="ctr">
+                    <a:lnL w="12700" cap="flat" cmpd="sng" algn="ctr">
+                      <a:solidFill>
+                        <a:schemeClr val="tx1"/>
+                      </a:solidFill>
+                      <a:prstDash val="solid"/>
+                    </a:lnL>
+                    <a:lnR w="12700" cmpd="sng">
+                      <a:noFill/>
+                      <a:prstDash val="solid"/>
+                    </a:lnR>
+                    <a:lnT w="12700" cmpd="sng">
+                      <a:noFill/>
+                      <a:prstDash val="solid"/>
+                    </a:lnT>
+                    <a:lnB w="12700" cmpd="sng">
+                      <a:noFill/>
+                      <a:prstDash val="solid"/>
+                    </a:lnB>
+                    <a:noFill/>
+                  </a:tcPr>
+                </a:tc>
+                <a:tc>
+                  <a:txBody>
+                    <a:bodyPr/>
+                    <a:lstStyle/>
+                    <a:p>
+                      <a:pPr algn="l" fontAlgn="ctr">
+                        <a:buNone/>
+                      </a:pPr>
+                      <a:r>
+                        <a:rPr lang="fr-FR" sz="1700" b="0" i="0" u="none" strike="noStrike" cap="none" spc="0">
+                          <a:solidFill>
+                            <a:schemeClr val="tx1"/>
+                          </a:solidFill>
+                          <a:effectLst/>
+                          <a:latin typeface="Calibri" panose="020F0502020204030204" pitchFamily="34" charset="0"/>
+                        </a:rPr>
+                        <a:t>Doit prédire lorsqu’une ou plusieurs modalités sont totalement ou partiellement absentes à l’entraînement ou au test.</a:t>
+                      </a:r>
+                    </a:p>
+                  </a:txBody>
+                  <a:tcPr marL="96715" marR="28014" marT="27633" marB="94983" anchor="ctr">
+                    <a:lnL w="12700" cmpd="sng">
+                      <a:noFill/>
+                      <a:prstDash val="solid"/>
+                    </a:lnL>
+                    <a:lnR w="12700" cmpd="sng">
+                      <a:noFill/>
+                      <a:prstDash val="solid"/>
+                    </a:lnR>
+                    <a:lnT w="12700" cmpd="sng">
+                      <a:noFill/>
+                      <a:prstDash val="solid"/>
+                    </a:lnT>
+                    <a:lnB w="12700" cmpd="sng">
+                      <a:noFill/>
+                      <a:prstDash val="solid"/>
+                    </a:lnB>
+                    <a:noFill/>
+                  </a:tcPr>
+                </a:tc>
+                <a:extLst>
+                  <a:ext uri="{0D108BD9-81ED-4DB2-BD59-A6C34878D82A}">
+                    <a16:rowId xmlns:a16="http://schemas.microsoft.com/office/drawing/2014/main" val="777968713"/>
+                  </a:ext>
+                </a:extLst>
+              </a:tr>
+              <a:tr h="667182">
+                <a:tc>
+                  <a:txBody>
+                    <a:bodyPr/>
+                    <a:lstStyle/>
+                    <a:p>
+                      <a:pPr algn="l" fontAlgn="ctr">
+                        <a:buNone/>
+                      </a:pPr>
+                      <a:r>
+                        <a:rPr lang="es-AR" sz="1700" b="0" i="0" u="none" strike="noStrike" cap="none" spc="0">
+                          <a:solidFill>
+                            <a:schemeClr val="tx1"/>
+                          </a:solidFill>
+                          <a:effectLst/>
+                          <a:latin typeface="Calibri" panose="020F0502020204030204" pitchFamily="34" charset="0"/>
+                        </a:rPr>
+                        <a:t>Parallélisme des données</a:t>
+                      </a:r>
+                    </a:p>
+                  </a:txBody>
+                  <a:tcPr marL="96715" marR="28014" marT="27633" marB="94983" anchor="ctr">
+                    <a:lnL w="12700" cmpd="sng">
+                      <a:noFill/>
+                      <a:prstDash val="solid"/>
+                    </a:lnL>
+                    <a:lnR w="12700" cmpd="sng">
+                      <a:noFill/>
+                      <a:prstDash val="solid"/>
+                    </a:lnR>
+                    <a:lnT w="12700" cmpd="sng">
+                      <a:noFill/>
+                      <a:prstDash val="solid"/>
+                    </a:lnT>
+                    <a:lnB w="12700" cmpd="sng">
+                      <a:noFill/>
+                      <a:prstDash val="solid"/>
+                    </a:lnB>
+                    <a:solidFill>
+                      <a:schemeClr val="bg1">
+                        <a:lumMod val="95000"/>
+                      </a:schemeClr>
+                    </a:solidFill>
+                  </a:tcPr>
+                </a:tc>
+                <a:tc>
+                  <a:txBody>
+                    <a:bodyPr/>
+                    <a:lstStyle/>
+                    <a:p>
+                      <a:pPr algn="l" fontAlgn="ctr">
+                        <a:buNone/>
+                      </a:pPr>
+                      <a:r>
+                        <a:rPr lang="fr-FR" sz="1700" b="0" i="0" u="none" strike="noStrike" cap="none" spc="0">
+                          <a:solidFill>
+                            <a:schemeClr val="tx1"/>
+                          </a:solidFill>
+                          <a:effectLst/>
+                          <a:latin typeface="Calibri" panose="020F0502020204030204" pitchFamily="34" charset="0"/>
+                        </a:rPr>
+                        <a:t>Doit prendre en charge des données fortement appariées, faiblement appariées ou appariées via une modalité partagée.</a:t>
+                      </a:r>
+                    </a:p>
+                  </a:txBody>
+                  <a:tcPr marL="96715" marR="28014" marT="27633" marB="94983" anchor="ctr">
+                    <a:lnL w="12700" cmpd="sng">
+                      <a:noFill/>
+                      <a:prstDash val="solid"/>
+                    </a:lnL>
+                    <a:lnR w="12700" cmpd="sng">
+                      <a:noFill/>
+                      <a:prstDash val="solid"/>
+                    </a:lnR>
+                    <a:lnT w="12700" cmpd="sng">
+                      <a:noFill/>
+                      <a:prstDash val="solid"/>
+                    </a:lnT>
+                    <a:lnB w="12700" cmpd="sng">
+                      <a:noFill/>
+                      <a:prstDash val="solid"/>
+                    </a:lnB>
+                    <a:solidFill>
+                      <a:schemeClr val="bg1">
+                        <a:lumMod val="95000"/>
+                      </a:schemeClr>
+                    </a:solidFill>
+                  </a:tcPr>
+                </a:tc>
+                <a:extLst>
+                  <a:ext uri="{0D108BD9-81ED-4DB2-BD59-A6C34878D82A}">
+                    <a16:rowId xmlns:a16="http://schemas.microsoft.com/office/drawing/2014/main" val="3366187663"/>
+                  </a:ext>
+                </a:extLst>
+              </a:tr>
+              <a:tr h="667182">
+                <a:tc>
+                  <a:txBody>
+                    <a:bodyPr/>
+                    <a:lstStyle/>
+                    <a:p>
+                      <a:pPr algn="l" fontAlgn="ctr">
+                        <a:buNone/>
+                      </a:pPr>
+                      <a:r>
+                        <a:rPr lang="es-AR" sz="1700" b="0" i="0" u="none" strike="noStrike" cap="none" spc="0">
+                          <a:solidFill>
+                            <a:schemeClr val="tx1"/>
+                          </a:solidFill>
+                          <a:effectLst/>
+                          <a:latin typeface="Calibri" panose="020F0502020204030204" pitchFamily="34" charset="0"/>
+                        </a:rPr>
+                        <a:t>Modalité bruitée</a:t>
+                      </a:r>
+                    </a:p>
+                  </a:txBody>
+                  <a:tcPr marL="96715" marR="28014" marT="27633" marB="94983" anchor="ctr">
+                    <a:lnL w="12700" cap="flat" cmpd="sng" algn="ctr">
+                      <a:solidFill>
+                        <a:schemeClr val="tx1"/>
+                      </a:solidFill>
+                      <a:prstDash val="solid"/>
+                    </a:lnL>
+                    <a:lnR w="12700" cmpd="sng">
+                      <a:noFill/>
+                      <a:prstDash val="solid"/>
+                    </a:lnR>
+                    <a:lnT w="12700" cmpd="sng">
+                      <a:noFill/>
+                      <a:prstDash val="solid"/>
+                    </a:lnT>
+                    <a:lnB w="12700" cmpd="sng">
+                      <a:noFill/>
+                      <a:prstDash val="solid"/>
+                    </a:lnB>
+                    <a:noFill/>
+                  </a:tcPr>
+                </a:tc>
+                <a:tc>
+                  <a:txBody>
+                    <a:bodyPr/>
+                    <a:lstStyle/>
+                    <a:p>
+                      <a:pPr algn="l" fontAlgn="ctr">
+                        <a:buNone/>
+                      </a:pPr>
+                      <a:r>
+                        <a:rPr lang="fr-FR" sz="1700" b="0" i="0" u="none" strike="noStrike" cap="none" spc="0">
+                          <a:solidFill>
+                            <a:schemeClr val="tx1"/>
+                          </a:solidFill>
+                          <a:effectLst/>
+                          <a:latin typeface="Calibri" panose="020F0502020204030204" pitchFamily="34" charset="0"/>
+                        </a:rPr>
+                        <a:t>Doit fonctionner dans des conditions bruitées, que ce soit au niveau des données ou des annotations.</a:t>
+                      </a:r>
+                    </a:p>
+                  </a:txBody>
+                  <a:tcPr marL="96715" marR="28014" marT="27633" marB="94983" anchor="ctr">
+                    <a:lnL w="12700" cmpd="sng">
+                      <a:noFill/>
+                      <a:prstDash val="solid"/>
+                    </a:lnL>
+                    <a:lnR w="12700" cmpd="sng">
+                      <a:noFill/>
+                      <a:prstDash val="solid"/>
+                    </a:lnR>
+                    <a:lnT w="12700" cmpd="sng">
+                      <a:noFill/>
+                      <a:prstDash val="solid"/>
+                    </a:lnT>
+                    <a:lnB w="12700" cmpd="sng">
+                      <a:noFill/>
+                      <a:prstDash val="solid"/>
+                    </a:lnB>
+                    <a:noFill/>
+                  </a:tcPr>
+                </a:tc>
+                <a:extLst>
+                  <a:ext uri="{0D108BD9-81ED-4DB2-BD59-A6C34878D82A}">
+                    <a16:rowId xmlns:a16="http://schemas.microsoft.com/office/drawing/2014/main" val="3210030378"/>
+                  </a:ext>
+                </a:extLst>
+              </a:tr>
+              <a:tr h="667182">
+                <a:tc>
+                  <a:txBody>
+                    <a:bodyPr/>
+                    <a:lstStyle/>
+                    <a:p>
+                      <a:pPr algn="l" fontAlgn="ctr">
+                        <a:buNone/>
+                      </a:pPr>
+                      <a:r>
+                        <a:rPr lang="es-AR" sz="1700" b="0" i="0" u="none" strike="noStrike" cap="none" spc="0">
+                          <a:solidFill>
+                            <a:schemeClr val="tx1"/>
+                          </a:solidFill>
+                          <a:effectLst/>
+                          <a:latin typeface="Calibri" panose="020F0502020204030204" pitchFamily="34" charset="0"/>
+                        </a:rPr>
+                        <a:t>Annotations des modalités</a:t>
+                      </a:r>
+                    </a:p>
+                  </a:txBody>
+                  <a:tcPr marL="96715" marR="28014" marT="27633" marB="94983" anchor="ctr">
+                    <a:lnL w="12700" cmpd="sng">
+                      <a:noFill/>
+                      <a:prstDash val="solid"/>
+                    </a:lnL>
+                    <a:lnR w="12700" cmpd="sng">
+                      <a:noFill/>
+                      <a:prstDash val="solid"/>
+                    </a:lnR>
+                    <a:lnT w="12700" cmpd="sng">
+                      <a:noFill/>
+                      <a:prstDash val="solid"/>
+                    </a:lnT>
+                    <a:lnB w="12700" cmpd="sng">
+                      <a:noFill/>
+                      <a:prstDash val="solid"/>
+                    </a:lnB>
+                    <a:solidFill>
+                      <a:schemeClr val="bg1">
+                        <a:lumMod val="95000"/>
+                      </a:schemeClr>
+                    </a:solidFill>
+                  </a:tcPr>
+                </a:tc>
+                <a:tc>
+                  <a:txBody>
+                    <a:bodyPr/>
+                    <a:lstStyle/>
+                    <a:p>
+                      <a:pPr algn="l" fontAlgn="ctr">
+                        <a:buNone/>
+                      </a:pPr>
+                      <a:r>
+                        <a:rPr lang="fr-FR" sz="1700" b="0" i="0" u="none" strike="noStrike" cap="none" spc="0">
+                          <a:solidFill>
+                            <a:schemeClr val="tx1"/>
+                          </a:solidFill>
+                          <a:effectLst/>
+                          <a:latin typeface="Calibri" panose="020F0502020204030204" pitchFamily="34" charset="0"/>
+                        </a:rPr>
+                        <a:t>Doit gérer les modalités annotées, partiellement annotées ou non annotées pendant l’entraînement.</a:t>
+                      </a:r>
+                    </a:p>
+                  </a:txBody>
+                  <a:tcPr marL="96715" marR="28014" marT="27633" marB="94983" anchor="ctr">
+                    <a:lnL w="12700" cmpd="sng">
+                      <a:noFill/>
+                      <a:prstDash val="solid"/>
+                    </a:lnL>
+                    <a:lnR w="12700" cmpd="sng">
+                      <a:noFill/>
+                      <a:prstDash val="solid"/>
+                    </a:lnR>
+                    <a:lnT w="12700" cmpd="sng">
+                      <a:noFill/>
+                      <a:prstDash val="solid"/>
+                    </a:lnT>
+                    <a:lnB w="12700" cmpd="sng">
+                      <a:noFill/>
+                      <a:prstDash val="solid"/>
+                    </a:lnB>
+                    <a:solidFill>
+                      <a:schemeClr val="bg1">
+                        <a:lumMod val="95000"/>
+                      </a:schemeClr>
+                    </a:solidFill>
+                  </a:tcPr>
+                </a:tc>
+                <a:extLst>
+                  <a:ext uri="{0D108BD9-81ED-4DB2-BD59-A6C34878D82A}">
+                    <a16:rowId xmlns:a16="http://schemas.microsoft.com/office/drawing/2014/main" val="2458978210"/>
+                  </a:ext>
+                </a:extLst>
+              </a:tr>
+              <a:tr h="667182">
+                <a:tc>
+                  <a:txBody>
+                    <a:bodyPr/>
+                    <a:lstStyle/>
+                    <a:p>
+                      <a:pPr algn="l" fontAlgn="ctr">
+                        <a:buNone/>
+                      </a:pPr>
+                      <a:r>
+                        <a:rPr lang="es-AR" sz="1700" b="0" i="0" u="none" strike="noStrike" cap="none" spc="0">
+                          <a:solidFill>
+                            <a:schemeClr val="tx1"/>
+                          </a:solidFill>
+                          <a:effectLst/>
+                          <a:latin typeface="Calibri" panose="020F0502020204030204" pitchFamily="34" charset="0"/>
+                        </a:rPr>
+                        <a:t>Adaptation de domaine</a:t>
+                      </a:r>
+                    </a:p>
+                  </a:txBody>
+                  <a:tcPr marL="96715" marR="28014" marT="27633" marB="94983" anchor="ctr">
+                    <a:lnL w="12700" cap="flat" cmpd="sng" algn="ctr">
+                      <a:solidFill>
+                        <a:schemeClr val="tx1"/>
+                      </a:solidFill>
+                      <a:prstDash val="solid"/>
+                    </a:lnL>
+                    <a:lnR w="12700" cmpd="sng">
+                      <a:noFill/>
+                      <a:prstDash val="solid"/>
+                    </a:lnR>
+                    <a:lnT w="12700" cmpd="sng">
+                      <a:noFill/>
+                      <a:prstDash val="solid"/>
+                    </a:lnT>
+                    <a:lnB w="12700" cmpd="sng">
+                      <a:noFill/>
+                      <a:prstDash val="solid"/>
+                    </a:lnB>
+                    <a:noFill/>
+                  </a:tcPr>
+                </a:tc>
+                <a:tc>
+                  <a:txBody>
+                    <a:bodyPr/>
+                    <a:lstStyle/>
+                    <a:p>
+                      <a:pPr algn="l" fontAlgn="ctr">
+                        <a:buNone/>
+                      </a:pPr>
+                      <a:r>
+                        <a:rPr lang="fr-FR" sz="1700" b="0" i="0" u="none" strike="noStrike" cap="none" spc="0">
+                          <a:solidFill>
+                            <a:schemeClr val="tx1"/>
+                          </a:solidFill>
+                          <a:effectLst/>
+                          <a:latin typeface="Calibri" panose="020F0502020204030204" pitchFamily="34" charset="0"/>
+                        </a:rPr>
+                        <a:t>Doit être performant même lorsqu’il y a un changement de jeu de données / domaine / modalité entre l’entraînement et le test.</a:t>
+                      </a:r>
+                    </a:p>
+                  </a:txBody>
+                  <a:tcPr marL="96715" marR="28014" marT="27633" marB="94983" anchor="ctr">
+                    <a:lnL w="12700" cmpd="sng">
+                      <a:noFill/>
+                      <a:prstDash val="solid"/>
+                    </a:lnL>
+                    <a:lnR w="12700" cmpd="sng">
+                      <a:noFill/>
+                      <a:prstDash val="solid"/>
+                    </a:lnR>
+                    <a:lnT w="12700" cmpd="sng">
+                      <a:noFill/>
+                      <a:prstDash val="solid"/>
+                    </a:lnT>
+                    <a:lnB w="12700" cmpd="sng">
+                      <a:noFill/>
+                      <a:prstDash val="solid"/>
+                    </a:lnB>
+                    <a:noFill/>
+                  </a:tcPr>
+                </a:tc>
+                <a:extLst>
+                  <a:ext uri="{0D108BD9-81ED-4DB2-BD59-A6C34878D82A}">
+                    <a16:rowId xmlns:a16="http://schemas.microsoft.com/office/drawing/2014/main" val="4015416478"/>
+                  </a:ext>
+                </a:extLst>
+              </a:tr>
+              <a:tr h="667182">
+                <a:tc>
+                  <a:txBody>
+                    <a:bodyPr/>
+                    <a:lstStyle/>
+                    <a:p>
+                      <a:pPr algn="l" fontAlgn="ctr">
+                        <a:buNone/>
+                      </a:pPr>
+                      <a:r>
+                        <a:rPr lang="es-AR" sz="1700" b="0" i="0" u="none" strike="noStrike" cap="none" spc="0">
+                          <a:solidFill>
+                            <a:schemeClr val="tx1"/>
+                          </a:solidFill>
+                          <a:effectLst/>
+                          <a:latin typeface="Calibri" panose="020F0502020204030204" pitchFamily="34" charset="0"/>
+                        </a:rPr>
+                        <a:t>Interprétabilité et équité</a:t>
+                      </a:r>
+                    </a:p>
+                  </a:txBody>
+                  <a:tcPr marL="96715" marR="28014" marT="27633" marB="94983" anchor="ctr">
+                    <a:lnL w="12700" cmpd="sng">
+                      <a:noFill/>
+                      <a:prstDash val="solid"/>
+                    </a:lnL>
+                    <a:lnR w="12700" cmpd="sng">
+                      <a:noFill/>
+                      <a:prstDash val="solid"/>
+                    </a:lnR>
+                    <a:lnT w="12700" cmpd="sng">
+                      <a:noFill/>
+                      <a:prstDash val="solid"/>
+                    </a:lnT>
+                    <a:lnB w="12700" cap="flat" cmpd="sng" algn="ctr">
+                      <a:noFill/>
+                      <a:prstDash val="solid"/>
+                    </a:lnB>
+                    <a:solidFill>
+                      <a:schemeClr val="bg1">
+                        <a:lumMod val="95000"/>
+                      </a:schemeClr>
+                    </a:solidFill>
+                  </a:tcPr>
+                </a:tc>
+                <a:tc>
+                  <a:txBody>
+                    <a:bodyPr/>
+                    <a:lstStyle/>
+                    <a:p>
+                      <a:pPr algn="l" fontAlgn="ctr">
+                        <a:buNone/>
+                      </a:pPr>
+                      <a:r>
+                        <a:rPr lang="fr-FR" sz="1700" b="0" i="0" u="none" strike="noStrike" cap="none" spc="0" dirty="0">
+                          <a:solidFill>
+                            <a:schemeClr val="tx1"/>
+                          </a:solidFill>
+                          <a:effectLst/>
+                          <a:latin typeface="Calibri" panose="020F0502020204030204" pitchFamily="34" charset="0"/>
+                        </a:rPr>
+                        <a:t>Doit fournir des prédictions interprétables et non biaisées, accompagnées d’explications et respectant l’équité.</a:t>
+                      </a:r>
+                    </a:p>
+                  </a:txBody>
+                  <a:tcPr marL="96715" marR="28014" marT="27633" marB="94983" anchor="ctr">
+                    <a:lnL w="12700" cmpd="sng">
+                      <a:noFill/>
+                      <a:prstDash val="solid"/>
+                    </a:lnL>
+                    <a:lnR w="12700" cmpd="sng">
+                      <a:noFill/>
+                      <a:prstDash val="solid"/>
+                    </a:lnR>
+                    <a:lnT w="12700" cmpd="sng">
+                      <a:noFill/>
+                      <a:prstDash val="solid"/>
+                    </a:lnT>
+                    <a:lnB w="12700" cap="flat" cmpd="sng" algn="ctr">
+                      <a:noFill/>
+                      <a:prstDash val="solid"/>
+                    </a:lnB>
+                    <a:solidFill>
+                      <a:schemeClr val="bg1">
+                        <a:lumMod val="95000"/>
+                      </a:schemeClr>
+                    </a:solidFill>
+                  </a:tcPr>
+                </a:tc>
+                <a:extLst>
+                  <a:ext uri="{0D108BD9-81ED-4DB2-BD59-A6C34878D82A}">
+                    <a16:rowId xmlns:a16="http://schemas.microsoft.com/office/drawing/2014/main" val="3243482671"/>
+                  </a:ext>
+                </a:extLst>
+              </a:tr>
+            </a:tbl>
+          </a:graphicData>
+        </a:graphic>
+      </p:graphicFrame>
+    </p:spTree>
+    <p:extLst>
+      <p:ext uri="{BB962C8B-B14F-4D97-AF65-F5344CB8AC3E}">
+        <p14:creationId xmlns:p14="http://schemas.microsoft.com/office/powerpoint/2010/main" val="3899052920"/>
       </p:ext>
     </p:extLst>
   </p:cSld>
